--- a/docs/RIoT10.pptx
+++ b/docs/RIoT10.pptx
@@ -282,7 +282,7 @@
           <a:p>
             <a:fld id="{66B36BF8-532B-4151-84A3-AC127562CCF5}" type="datetimeFigureOut">
               <a:rPr lang="de-DE" smtClean="0"/>
-              <a:t>19.01.2026</a:t>
+              <a:t>30.01.2026</a:t>
             </a:fld>
             <a:endParaRPr lang="de-DE"/>
           </a:p>
@@ -482,7 +482,7 @@
           <a:p>
             <a:fld id="{66B36BF8-532B-4151-84A3-AC127562CCF5}" type="datetimeFigureOut">
               <a:rPr lang="de-DE" smtClean="0"/>
-              <a:t>19.01.2026</a:t>
+              <a:t>30.01.2026</a:t>
             </a:fld>
             <a:endParaRPr lang="de-DE"/>
           </a:p>
@@ -692,7 +692,7 @@
           <a:p>
             <a:fld id="{66B36BF8-532B-4151-84A3-AC127562CCF5}" type="datetimeFigureOut">
               <a:rPr lang="de-DE" smtClean="0"/>
-              <a:t>19.01.2026</a:t>
+              <a:t>30.01.2026</a:t>
             </a:fld>
             <a:endParaRPr lang="de-DE"/>
           </a:p>
@@ -892,7 +892,7 @@
           <a:p>
             <a:fld id="{66B36BF8-532B-4151-84A3-AC127562CCF5}" type="datetimeFigureOut">
               <a:rPr lang="de-DE" smtClean="0"/>
-              <a:t>19.01.2026</a:t>
+              <a:t>30.01.2026</a:t>
             </a:fld>
             <a:endParaRPr lang="de-DE"/>
           </a:p>
@@ -1168,7 +1168,7 @@
           <a:p>
             <a:fld id="{66B36BF8-532B-4151-84A3-AC127562CCF5}" type="datetimeFigureOut">
               <a:rPr lang="de-DE" smtClean="0"/>
-              <a:t>19.01.2026</a:t>
+              <a:t>30.01.2026</a:t>
             </a:fld>
             <a:endParaRPr lang="de-DE"/>
           </a:p>
@@ -1436,7 +1436,7 @@
           <a:p>
             <a:fld id="{66B36BF8-532B-4151-84A3-AC127562CCF5}" type="datetimeFigureOut">
               <a:rPr lang="de-DE" smtClean="0"/>
-              <a:t>19.01.2026</a:t>
+              <a:t>30.01.2026</a:t>
             </a:fld>
             <a:endParaRPr lang="de-DE"/>
           </a:p>
@@ -1851,7 +1851,7 @@
           <a:p>
             <a:fld id="{66B36BF8-532B-4151-84A3-AC127562CCF5}" type="datetimeFigureOut">
               <a:rPr lang="de-DE" smtClean="0"/>
-              <a:t>19.01.2026</a:t>
+              <a:t>30.01.2026</a:t>
             </a:fld>
             <a:endParaRPr lang="de-DE"/>
           </a:p>
@@ -1993,7 +1993,7 @@
           <a:p>
             <a:fld id="{66B36BF8-532B-4151-84A3-AC127562CCF5}" type="datetimeFigureOut">
               <a:rPr lang="de-DE" smtClean="0"/>
-              <a:t>19.01.2026</a:t>
+              <a:t>30.01.2026</a:t>
             </a:fld>
             <a:endParaRPr lang="de-DE"/>
           </a:p>
@@ -2106,7 +2106,7 @@
           <a:p>
             <a:fld id="{66B36BF8-532B-4151-84A3-AC127562CCF5}" type="datetimeFigureOut">
               <a:rPr lang="de-DE" smtClean="0"/>
-              <a:t>19.01.2026</a:t>
+              <a:t>30.01.2026</a:t>
             </a:fld>
             <a:endParaRPr lang="de-DE"/>
           </a:p>
@@ -2419,7 +2419,7 @@
           <a:p>
             <a:fld id="{66B36BF8-532B-4151-84A3-AC127562CCF5}" type="datetimeFigureOut">
               <a:rPr lang="de-DE" smtClean="0"/>
-              <a:t>19.01.2026</a:t>
+              <a:t>30.01.2026</a:t>
             </a:fld>
             <a:endParaRPr lang="de-DE"/>
           </a:p>
@@ -2708,7 +2708,7 @@
           <a:p>
             <a:fld id="{66B36BF8-532B-4151-84A3-AC127562CCF5}" type="datetimeFigureOut">
               <a:rPr lang="de-DE" smtClean="0"/>
-              <a:t>19.01.2026</a:t>
+              <a:t>30.01.2026</a:t>
             </a:fld>
             <a:endParaRPr lang="de-DE"/>
           </a:p>
@@ -2951,7 +2951,7 @@
           <a:p>
             <a:fld id="{66B36BF8-532B-4151-84A3-AC127562CCF5}" type="datetimeFigureOut">
               <a:rPr lang="de-DE" smtClean="0"/>
-              <a:t>19.01.2026</a:t>
+              <a:t>30.01.2026</a:t>
             </a:fld>
             <a:endParaRPr lang="de-DE"/>
           </a:p>
@@ -3390,9 +3390,10 @@
           <a:lstStyle/>
           <a:p>
             <a:r>
-              <a:rPr lang="de-DE" dirty="0"/>
-              <a:t>Week 09</a:t>
-            </a:r>
+              <a:rPr lang="de-DE"/>
+              <a:t>Week 10</a:t>
+            </a:r>
+            <a:endParaRPr lang="de-DE" dirty="0"/>
           </a:p>
         </p:txBody>
       </p:sp>
